--- a/curriculum/M01/W02/L01/slides.pptx
+++ b/curriculum/M01/W02/L01/slides.pptx
@@ -17108,11 +17108,40 @@
                 <a:ea typeface="Malgun Gothic"/>
                 <a:cs typeface="Malgun Gothic"/>
               </a:rPr>
-              <a:t>: Glomerulus를 둘러싼 주머니로 여과액을 받는다. 2. </a:t>
-            </a:r>
+              <a:t>: Glomerulus를 둘러싼 주머니로 여과액을 받는다.</a:t>
+            </a:r>
+          </a:p>
+          <a:p>
+            <a:pPr>
+              <a:spcAft>
+                <a:spcPts val="900"/>
+              </a:spcAft>
+            </a:pPr>
             <a:r>
               <a:rPr sz="1400" b="1" i="0">
                 <a:solidFill>
+                  <a:srgbClr val="F2B705"/>
+                </a:solidFill>
+                <a:latin typeface="Malgun Gothic"/>
+                <a:ea typeface="Malgun Gothic"/>
+                <a:cs typeface="Malgun Gothic"/>
+              </a:rPr>
+              <a:t>•  </a:t>
+            </a:r>
+            <a:r>
+              <a:rPr sz="1400" b="0" i="0">
+                <a:solidFill>
+                  <a:srgbClr val="11202B"/>
+                </a:solidFill>
+                <a:latin typeface="Malgun Gothic"/>
+                <a:ea typeface="Malgun Gothic"/>
+                <a:cs typeface="Malgun Gothic"/>
+              </a:rPr>
+              <a:t>2. </a:t>
+            </a:r>
+            <a:r>
+              <a:rPr sz="1400" b="1" i="0">
+                <a:solidFill>
                   <a:srgbClr val="11202B"/>
                 </a:solidFill>
                 <a:latin typeface="Malgun Gothic"/>
@@ -17130,11 +17159,40 @@
                 <a:ea typeface="Malgun Gothic"/>
                 <a:cs typeface="Malgun Gothic"/>
               </a:rPr>
-              <a:t>: 재흡수의 대부분이 여기서 일어난다. 3. </a:t>
-            </a:r>
+              <a:t>: 재흡수의 대부분이 여기서 일어난다.</a:t>
+            </a:r>
+          </a:p>
+          <a:p>
+            <a:pPr>
+              <a:spcAft>
+                <a:spcPts val="900"/>
+              </a:spcAft>
+            </a:pPr>
             <a:r>
               <a:rPr sz="1400" b="1" i="0">
                 <a:solidFill>
+                  <a:srgbClr val="F2B705"/>
+                </a:solidFill>
+                <a:latin typeface="Malgun Gothic"/>
+                <a:ea typeface="Malgun Gothic"/>
+                <a:cs typeface="Malgun Gothic"/>
+              </a:rPr>
+              <a:t>•  </a:t>
+            </a:r>
+            <a:r>
+              <a:rPr sz="1400" b="0" i="0">
+                <a:solidFill>
+                  <a:srgbClr val="11202B"/>
+                </a:solidFill>
+                <a:latin typeface="Malgun Gothic"/>
+                <a:ea typeface="Malgun Gothic"/>
+                <a:cs typeface="Malgun Gothic"/>
+              </a:rPr>
+              <a:t>3. </a:t>
+            </a:r>
+            <a:r>
+              <a:rPr sz="1400" b="1" i="0">
+                <a:solidFill>
                   <a:srgbClr val="11202B"/>
                 </a:solidFill>
                 <a:latin typeface="Malgun Gothic"/>
@@ -17152,11 +17210,40 @@
                 <a:ea typeface="Malgun Gothic"/>
                 <a:cs typeface="Malgun Gothic"/>
               </a:rPr>
-              <a:t>: 겉질에서 속질로 내려가는 하행지와 다시 올라오는 상행지로 이루어진다. 삼투압 기울기를 만든다. 4. </a:t>
-            </a:r>
+              <a:t>: 겉질에서 속질로 내려가는 하행지와 다시 올라오는 상행지로 이루어진다. 삼투압 기울기를 만든다.</a:t>
+            </a:r>
+          </a:p>
+          <a:p>
+            <a:pPr>
+              <a:spcAft>
+                <a:spcPts val="900"/>
+              </a:spcAft>
+            </a:pPr>
             <a:r>
               <a:rPr sz="1400" b="1" i="0">
                 <a:solidFill>
+                  <a:srgbClr val="F2B705"/>
+                </a:solidFill>
+                <a:latin typeface="Malgun Gothic"/>
+                <a:ea typeface="Malgun Gothic"/>
+                <a:cs typeface="Malgun Gothic"/>
+              </a:rPr>
+              <a:t>•  </a:t>
+            </a:r>
+            <a:r>
+              <a:rPr sz="1400" b="0" i="0">
+                <a:solidFill>
+                  <a:srgbClr val="11202B"/>
+                </a:solidFill>
+                <a:latin typeface="Malgun Gothic"/>
+                <a:ea typeface="Malgun Gothic"/>
+                <a:cs typeface="Malgun Gothic"/>
+              </a:rPr>
+              <a:t>4. </a:t>
+            </a:r>
+            <a:r>
+              <a:rPr sz="1400" b="1" i="0">
+                <a:solidFill>
                   <a:srgbClr val="11202B"/>
                 </a:solidFill>
                 <a:latin typeface="Malgun Gothic"/>
@@ -17174,7 +17261,36 @@
                 <a:ea typeface="Malgun Gothic"/>
                 <a:cs typeface="Malgun Gothic"/>
               </a:rPr>
-              <a:t>: 미세 조정이 시작된다. 5. </a:t>
+              <a:t>: 미세 조정이 시작된다.</a:t>
+            </a:r>
+          </a:p>
+          <a:p>
+            <a:pPr>
+              <a:spcAft>
+                <a:spcPts val="900"/>
+              </a:spcAft>
+            </a:pPr>
+            <a:r>
+              <a:rPr sz="1400" b="1" i="0">
+                <a:solidFill>
+                  <a:srgbClr val="F2B705"/>
+                </a:solidFill>
+                <a:latin typeface="Malgun Gothic"/>
+                <a:ea typeface="Malgun Gothic"/>
+                <a:cs typeface="Malgun Gothic"/>
+              </a:rPr>
+              <a:t>•  </a:t>
+            </a:r>
+            <a:r>
+              <a:rPr sz="1400" b="0" i="0">
+                <a:solidFill>
+                  <a:srgbClr val="11202B"/>
+                </a:solidFill>
+                <a:latin typeface="Malgun Gothic"/>
+                <a:ea typeface="Malgun Gothic"/>
+                <a:cs typeface="Malgun Gothic"/>
+              </a:rPr>
+              <a:t>5. </a:t>
             </a:r>
             <a:r>
               <a:rPr sz="1400" b="1" i="0">

--- a/curriculum/M01/W02/L01/slides.pptx
+++ b/curriculum/M01/W02/L01/slides.pptx
@@ -14994,7 +14994,7 @@
                 <a:ea typeface="Malgun Gothic"/>
                 <a:cs typeface="Malgun Gothic"/>
               </a:rPr>
-              <a:t>M01-W01-L01 순환계 요약 — 모세혈관 교환, Starling 힘, RAAS, 혈압 조절</a:t>
+              <a:t>M01-W01-L01 순환계 요약: 심장·혈관·혈류와 항상성 — 모세혈관 교환, Starling 힘, RAAS, 혈압 조절</a:t>
             </a:r>
           </a:p>
           <a:p>
@@ -15023,7 +15023,7 @@
                 <a:ea typeface="Malgun Gothic"/>
                 <a:cs typeface="Malgun Gothic"/>
               </a:rPr>
-              <a:t>M01-W01-L02 호흡계 요약 — Henderson–Hasselbalch 식, 산–염기 장애의 네 분류</a:t>
+              <a:t>M01-W01-L02 호흡계 요약: 환기·가스교환·산소 운반 — Henderson–Hasselbalch 식, 산–염기 장애의 네 분류</a:t>
             </a:r>
           </a:p>
           <a:p>
